--- a/assets/powerpoints/module-n2-panier/C2-l-etiquette-et-l-affichette.pptx
+++ b/assets/powerpoints/module-n2-panier/C2-l-etiquette-et-l-affichette.pptx
@@ -9821,7 +9821,97 @@
                 </a:solidFill>
                 <a:latin typeface="Verdana"/>
               </a:rPr>
-              <a:t>un kilo &lt;b&gt;de&lt;/b&gt; riz · un litre &lt;b&gt;de&lt;/b&gt; lait · une douzaine &lt;b&gt;d'&lt;/b&gt;œufs · un sac &lt;b&gt;d'&lt;/b&gt;oranges. Après « de », le produit vient seul : on ne dit jamais « un litre de &lt;b&gt;le&lt;/b&gt; lait ».</a:t>
+              <a:t>un kilo </a:t>
+            </a:r>
+            <a:r>
+              <a:rPr sz="2000" b="1" i="0">
+                <a:solidFill>
+                  <a:srgbClr val="4B4F52"/>
+                </a:solidFill>
+                <a:latin typeface="Verdana"/>
+              </a:rPr>
+              <a:t>de</a:t>
+            </a:r>
+            <a:r>
+              <a:rPr sz="2000" b="0" i="0">
+                <a:solidFill>
+                  <a:srgbClr val="4B4F52"/>
+                </a:solidFill>
+                <a:latin typeface="Verdana"/>
+              </a:rPr>
+              <a:t> riz · un litre </a:t>
+            </a:r>
+            <a:r>
+              <a:rPr sz="2000" b="1" i="0">
+                <a:solidFill>
+                  <a:srgbClr val="4B4F52"/>
+                </a:solidFill>
+                <a:latin typeface="Verdana"/>
+              </a:rPr>
+              <a:t>de</a:t>
+            </a:r>
+            <a:r>
+              <a:rPr sz="2000" b="0" i="0">
+                <a:solidFill>
+                  <a:srgbClr val="4B4F52"/>
+                </a:solidFill>
+                <a:latin typeface="Verdana"/>
+              </a:rPr>
+              <a:t> lait · une douzaine </a:t>
+            </a:r>
+            <a:r>
+              <a:rPr sz="2000" b="1" i="0">
+                <a:solidFill>
+                  <a:srgbClr val="4B4F52"/>
+                </a:solidFill>
+                <a:latin typeface="Verdana"/>
+              </a:rPr>
+              <a:t>d'</a:t>
+            </a:r>
+            <a:r>
+              <a:rPr sz="2000" b="0" i="0">
+                <a:solidFill>
+                  <a:srgbClr val="4B4F52"/>
+                </a:solidFill>
+                <a:latin typeface="Verdana"/>
+              </a:rPr>
+              <a:t>œufs · un sac </a:t>
+            </a:r>
+            <a:r>
+              <a:rPr sz="2000" b="1" i="0">
+                <a:solidFill>
+                  <a:srgbClr val="4B4F52"/>
+                </a:solidFill>
+                <a:latin typeface="Verdana"/>
+              </a:rPr>
+              <a:t>d'</a:t>
+            </a:r>
+            <a:r>
+              <a:rPr sz="2000" b="0" i="0">
+                <a:solidFill>
+                  <a:srgbClr val="4B4F52"/>
+                </a:solidFill>
+                <a:latin typeface="Verdana"/>
+              </a:rPr>
+              <a:t>oranges. Après « de », le produit vient seul : on ne dit jamais « un litre de </a:t>
+            </a:r>
+            <a:r>
+              <a:rPr sz="2000" b="1" i="0">
+                <a:solidFill>
+                  <a:srgbClr val="4B4F52"/>
+                </a:solidFill>
+                <a:latin typeface="Verdana"/>
+              </a:rPr>
+              <a:t>le</a:t>
+            </a:r>
+            <a:r>
+              <a:rPr sz="2000" b="0" i="0">
+                <a:solidFill>
+                  <a:srgbClr val="4B4F52"/>
+                </a:solidFill>
+                <a:latin typeface="Verdana"/>
+              </a:rPr>
+              <a:t> lait ».</a:t>
             </a:r>
           </a:p>
         </p:txBody>
